--- a/docs/DADD2026-Enewable-Soevereine-Cloud.pptx
+++ b/docs/DADD2026-Enewable-Soevereine-Cloud.pptx
@@ -7474,7 +7474,7 @@
         <p:spPr>
           <a:xfrm flipV="1">
             <a:off x="3794760" y="2377440"/>
-            <a:ext cx="4572000" cy="-1325880"/>
+            <a:ext cx="4572000" cy="1325880"/>
           </a:xfrm>
           <a:prstGeom prst="line">
             <a:avLst/>
@@ -7498,7 +7498,7 @@
         <p:spPr>
           <a:xfrm flipV="1">
             <a:off x="3794760" y="3520440"/>
-            <a:ext cx="4572000" cy="-182880"/>
+            <a:ext cx="4572000" cy="182880"/>
           </a:xfrm>
           <a:prstGeom prst="line">
             <a:avLst/>

--- a/docs/DADD2026-Enewable-Soevereine-Cloud.pptx
+++ b/docs/DADD2026-Enewable-Soevereine-Cloud.pptx
@@ -5231,7 +5231,7 @@
                 <a:ea typeface="Calibri" pitchFamily="34" charset="-122"/>
                 <a:cs typeface="Calibri" pitchFamily="34" charset="-120"/>
               </a:rPr>
-              <a:t>Soevereiniteit is een classificatievraagstuk — niet een landkaart.</a:t>
+              <a:t>Soevereiniteit is een governancevraagstuk — niet een landkaart.</a:t>
             </a:r>
             <a:endParaRPr lang="en-US" sz="1800" dirty="0"/>
           </a:p>
@@ -5467,7 +5467,7 @@
                 <a:ea typeface="Calibri" pitchFamily="34" charset="-122"/>
                 <a:cs typeface="Calibri" pitchFamily="34" charset="-120"/>
               </a:rPr>
-              <a:t>bewegingsvraagstuk</a:t>
+              <a:t>governancevraagstuk</a:t>
             </a:r>
             <a:pPr algn="l" indent="0" marL="0">
               <a:buNone/>
@@ -6744,12 +6744,852 @@
         </p:nvSpPr>
         <p:spPr>
           <a:xfrm>
-            <a:off x="640080" y="1920240"/>
-            <a:ext cx="3017520" cy="3566160"/>
+            <a:off x="457200" y="1371600"/>
+            <a:ext cx="1965960" cy="1234440"/>
           </a:xfrm>
           <a:prstGeom prst="roundRect">
             <a:avLst>
-              <a:gd name="adj" fmla="val 3636"/>
+              <a:gd name="adj" fmla="val 7407"/>
+            </a:avLst>
+          </a:prstGeom>
+          <a:solidFill>
+            <a:srgbClr val="FFFFFF"/>
+          </a:solidFill>
+          <a:ln w="15875">
+            <a:solidFill>
+              <a:srgbClr val="093B5F"/>
+            </a:solidFill>
+            <a:prstDash val="solid"/>
+          </a:ln>
+        </p:spPr>
+      </p:sp>
+      <p:sp>
+        <p:nvSpPr>
+          <p:cNvPr id="4" name="Text 2"/>
+          <p:cNvSpPr txBox="1"/>
+          <p:nvPr/>
+        </p:nvSpPr>
+        <p:spPr>
+          <a:xfrm>
+            <a:off x="566928" y="1463040"/>
+            <a:ext cx="1746504" cy="292608"/>
+          </a:xfrm>
+          <a:prstGeom prst="rect">
+            <a:avLst/>
+          </a:prstGeom>
+          <a:noFill/>
+          <a:ln/>
+        </p:spPr>
+        <p:txBody>
+          <a:bodyPr wrap="square" lIns="0" tIns="0" rIns="0" bIns="0" rtlCol="0" anchor="ctr"/>
+          <a:lstStyle/>
+          <a:p>
+            <a:pPr algn="ctr" indent="0" marL="0">
+              <a:buNone/>
+            </a:pPr>
+            <a:r>
+              <a:rPr lang="en-US" sz="1200" b="1" dirty="0">
+                <a:solidFill>
+                  <a:srgbClr val="093B5F"/>
+                </a:solidFill>
+                <a:latin typeface="Calibri" pitchFamily="34" charset="0"/>
+                <a:ea typeface="Calibri" pitchFamily="34" charset="-122"/>
+                <a:cs typeface="Calibri" pitchFamily="34" charset="-120"/>
+              </a:rPr>
+              <a:t>stm CLI</a:t>
+            </a:r>
+            <a:endParaRPr lang="en-US" sz="1200" dirty="0"/>
+          </a:p>
+        </p:txBody>
+      </p:sp>
+      <p:sp>
+        <p:nvSpPr>
+          <p:cNvPr id="5" name="Shape 3"/>
+          <p:cNvSpPr/>
+          <p:nvPr/>
+        </p:nvSpPr>
+        <p:spPr>
+          <a:xfrm>
+            <a:off x="594360" y="1792224"/>
+            <a:ext cx="1691640" cy="0"/>
+          </a:xfrm>
+          <a:prstGeom prst="line">
+            <a:avLst/>
+          </a:prstGeom>
+          <a:noFill/>
+          <a:ln w="9525">
+            <a:solidFill>
+              <a:srgbClr val="D6D6D6"/>
+            </a:solidFill>
+            <a:prstDash val="solid"/>
+          </a:ln>
+        </p:spPr>
+      </p:sp>
+      <p:sp>
+        <p:nvSpPr>
+          <p:cNvPr id="6" name="Shape 4"/>
+          <p:cNvSpPr/>
+          <p:nvPr/>
+        </p:nvSpPr>
+        <p:spPr>
+          <a:xfrm>
+            <a:off x="603504" y="1929384"/>
+            <a:ext cx="91440" cy="91440"/>
+          </a:xfrm>
+          <a:prstGeom prst="ellipse">
+            <a:avLst/>
+          </a:prstGeom>
+          <a:solidFill>
+            <a:srgbClr val="00C895"/>
+          </a:solidFill>
+          <a:ln/>
+        </p:spPr>
+      </p:sp>
+      <p:sp>
+        <p:nvSpPr>
+          <p:cNvPr id="7" name="Text 5"/>
+          <p:cNvSpPr txBox="1"/>
+          <p:nvPr/>
+        </p:nvSpPr>
+        <p:spPr>
+          <a:xfrm>
+            <a:off x="768096" y="1883664"/>
+            <a:ext cx="1545336" cy="201168"/>
+          </a:xfrm>
+          <a:prstGeom prst="rect">
+            <a:avLst/>
+          </a:prstGeom>
+          <a:noFill/>
+          <a:ln/>
+        </p:spPr>
+        <p:txBody>
+          <a:bodyPr wrap="square" lIns="0" tIns="0" rIns="0" bIns="0" rtlCol="0" anchor="ctr"/>
+          <a:lstStyle/>
+          <a:p>
+            <a:pPr algn="l" indent="0" marL="0">
+              <a:buNone/>
+            </a:pPr>
+            <a:r>
+              <a:rPr lang="en-US" sz="780" dirty="0">
+                <a:solidFill>
+                  <a:srgbClr val="3A3A3A"/>
+                </a:solidFill>
+                <a:latin typeface="Calibri" pitchFamily="34" charset="0"/>
+                <a:ea typeface="Calibri" pitchFamily="34" charset="-122"/>
+                <a:cs typeface="Calibri" pitchFamily="34" charset="-120"/>
+              </a:rPr>
+              <a:t>enewable/public/&gt;</a:t>
+            </a:r>
+            <a:endParaRPr lang="en-US" sz="780" dirty="0"/>
+          </a:p>
+        </p:txBody>
+      </p:sp>
+      <p:sp>
+        <p:nvSpPr>
+          <p:cNvPr id="8" name="Shape 6"/>
+          <p:cNvSpPr/>
+          <p:nvPr/>
+        </p:nvSpPr>
+        <p:spPr>
+          <a:xfrm>
+            <a:off x="603504" y="2167128"/>
+            <a:ext cx="91440" cy="91440"/>
+          </a:xfrm>
+          <a:prstGeom prst="ellipse">
+            <a:avLst/>
+          </a:prstGeom>
+          <a:solidFill>
+            <a:srgbClr val="093B5F"/>
+          </a:solidFill>
+          <a:ln/>
+        </p:spPr>
+      </p:sp>
+      <p:sp>
+        <p:nvSpPr>
+          <p:cNvPr id="9" name="Text 7"/>
+          <p:cNvSpPr txBox="1"/>
+          <p:nvPr/>
+        </p:nvSpPr>
+        <p:spPr>
+          <a:xfrm>
+            <a:off x="768096" y="2121408"/>
+            <a:ext cx="1545336" cy="201168"/>
+          </a:xfrm>
+          <a:prstGeom prst="rect">
+            <a:avLst/>
+          </a:prstGeom>
+          <a:noFill/>
+          <a:ln/>
+        </p:spPr>
+        <p:txBody>
+          <a:bodyPr wrap="square" lIns="0" tIns="0" rIns="0" bIns="0" rtlCol="0" anchor="ctr"/>
+          <a:lstStyle/>
+          <a:p>
+            <a:pPr algn="l" indent="0" marL="0">
+              <a:buNone/>
+            </a:pPr>
+            <a:r>
+              <a:rPr lang="en-US" sz="780" dirty="0">
+                <a:solidFill>
+                  <a:srgbClr val="3A3A3A"/>
+                </a:solidFill>
+                <a:latin typeface="Calibri" pitchFamily="34" charset="0"/>
+                <a:ea typeface="Calibri" pitchFamily="34" charset="-122"/>
+                <a:cs typeface="Calibri" pitchFamily="34" charset="-120"/>
+              </a:rPr>
+              <a:t>enewable/eu/ops/&gt;</a:t>
+            </a:r>
+            <a:endParaRPr lang="en-US" sz="780" dirty="0"/>
+          </a:p>
+        </p:txBody>
+      </p:sp>
+      <p:sp>
+        <p:nvSpPr>
+          <p:cNvPr id="10" name="Shape 8"/>
+          <p:cNvSpPr/>
+          <p:nvPr/>
+        </p:nvSpPr>
+        <p:spPr>
+          <a:xfrm>
+            <a:off x="603504" y="2404872"/>
+            <a:ext cx="91440" cy="91440"/>
+          </a:xfrm>
+          <a:prstGeom prst="ellipse">
+            <a:avLst/>
+          </a:prstGeom>
+          <a:solidFill>
+            <a:srgbClr val="FCA829"/>
+          </a:solidFill>
+          <a:ln/>
+        </p:spPr>
+      </p:sp>
+      <p:sp>
+        <p:nvSpPr>
+          <p:cNvPr id="11" name="Text 9"/>
+          <p:cNvSpPr txBox="1"/>
+          <p:nvPr/>
+        </p:nvSpPr>
+        <p:spPr>
+          <a:xfrm>
+            <a:off x="768096" y="2359152"/>
+            <a:ext cx="1545336" cy="201168"/>
+          </a:xfrm>
+          <a:prstGeom prst="rect">
+            <a:avLst/>
+          </a:prstGeom>
+          <a:noFill/>
+          <a:ln/>
+        </p:spPr>
+        <p:txBody>
+          <a:bodyPr wrap="square" lIns="0" tIns="0" rIns="0" bIns="0" rtlCol="0" anchor="ctr"/>
+          <a:lstStyle/>
+          <a:p>
+            <a:pPr algn="l" indent="0" marL="0">
+              <a:buNone/>
+            </a:pPr>
+            <a:r>
+              <a:rPr lang="en-US" sz="780" dirty="0">
+                <a:solidFill>
+                  <a:srgbClr val="3A3A3A"/>
+                </a:solidFill>
+                <a:latin typeface="Calibri" pitchFamily="34" charset="0"/>
+                <a:ea typeface="Calibri" pitchFamily="34" charset="-122"/>
+                <a:cs typeface="Calibri" pitchFamily="34" charset="-120"/>
+              </a:rPr>
+              <a:t>enewable/eu/pii/&gt;</a:t>
+            </a:r>
+            <a:endParaRPr lang="en-US" sz="780" dirty="0"/>
+          </a:p>
+        </p:txBody>
+      </p:sp>
+      <p:sp>
+        <p:nvSpPr>
+          <p:cNvPr id="12" name="Shape 10"/>
+          <p:cNvSpPr/>
+          <p:nvPr/>
+        </p:nvSpPr>
+        <p:spPr>
+          <a:xfrm>
+            <a:off x="457200" y="2788920"/>
+            <a:ext cx="1965960" cy="1234440"/>
+          </a:xfrm>
+          <a:prstGeom prst="roundRect">
+            <a:avLst>
+              <a:gd name="adj" fmla="val 7407"/>
+            </a:avLst>
+          </a:prstGeom>
+          <a:solidFill>
+            <a:srgbClr val="FFFFFF"/>
+          </a:solidFill>
+          <a:ln w="15875">
+            <a:solidFill>
+              <a:srgbClr val="093B5F"/>
+            </a:solidFill>
+            <a:prstDash val="solid"/>
+          </a:ln>
+        </p:spPr>
+      </p:sp>
+      <p:sp>
+        <p:nvSpPr>
+          <p:cNvPr id="13" name="Text 11"/>
+          <p:cNvSpPr txBox="1"/>
+          <p:nvPr/>
+        </p:nvSpPr>
+        <p:spPr>
+          <a:xfrm>
+            <a:off x="566928" y="2880360"/>
+            <a:ext cx="1746504" cy="292608"/>
+          </a:xfrm>
+          <a:prstGeom prst="rect">
+            <a:avLst/>
+          </a:prstGeom>
+          <a:noFill/>
+          <a:ln/>
+        </p:spPr>
+        <p:txBody>
+          <a:bodyPr wrap="square" lIns="0" tIns="0" rIns="0" bIns="0" rtlCol="0" anchor="ctr"/>
+          <a:lstStyle/>
+          <a:p>
+            <a:pPr algn="ctr" indent="0" marL="0">
+              <a:buNone/>
+            </a:pPr>
+            <a:r>
+              <a:rPr lang="en-US" sz="1200" b="1" dirty="0">
+                <a:solidFill>
+                  <a:srgbClr val="093B5F"/>
+                </a:solidFill>
+                <a:latin typeface="Calibri" pitchFamily="34" charset="0"/>
+                <a:ea typeface="Calibri" pitchFamily="34" charset="-122"/>
+                <a:cs typeface="Calibri" pitchFamily="34" charset="-120"/>
+              </a:rPr>
+              <a:t>Python-script</a:t>
+            </a:r>
+            <a:endParaRPr lang="en-US" sz="1200" dirty="0"/>
+          </a:p>
+        </p:txBody>
+      </p:sp>
+      <p:sp>
+        <p:nvSpPr>
+          <p:cNvPr id="14" name="Shape 12"/>
+          <p:cNvSpPr/>
+          <p:nvPr/>
+        </p:nvSpPr>
+        <p:spPr>
+          <a:xfrm>
+            <a:off x="594360" y="3209544"/>
+            <a:ext cx="1691640" cy="0"/>
+          </a:xfrm>
+          <a:prstGeom prst="line">
+            <a:avLst/>
+          </a:prstGeom>
+          <a:noFill/>
+          <a:ln w="9525">
+            <a:solidFill>
+              <a:srgbClr val="D6D6D6"/>
+            </a:solidFill>
+            <a:prstDash val="solid"/>
+          </a:ln>
+        </p:spPr>
+      </p:sp>
+      <p:sp>
+        <p:nvSpPr>
+          <p:cNvPr id="15" name="Shape 13"/>
+          <p:cNvSpPr/>
+          <p:nvPr/>
+        </p:nvSpPr>
+        <p:spPr>
+          <a:xfrm>
+            <a:off x="603504" y="3346704"/>
+            <a:ext cx="91440" cy="91440"/>
+          </a:xfrm>
+          <a:prstGeom prst="ellipse">
+            <a:avLst/>
+          </a:prstGeom>
+          <a:solidFill>
+            <a:srgbClr val="00C895"/>
+          </a:solidFill>
+          <a:ln/>
+        </p:spPr>
+      </p:sp>
+      <p:sp>
+        <p:nvSpPr>
+          <p:cNvPr id="16" name="Text 14"/>
+          <p:cNvSpPr txBox="1"/>
+          <p:nvPr/>
+        </p:nvSpPr>
+        <p:spPr>
+          <a:xfrm>
+            <a:off x="768096" y="3300984"/>
+            <a:ext cx="1545336" cy="201168"/>
+          </a:xfrm>
+          <a:prstGeom prst="rect">
+            <a:avLst/>
+          </a:prstGeom>
+          <a:noFill/>
+          <a:ln/>
+        </p:spPr>
+        <p:txBody>
+          <a:bodyPr wrap="square" lIns="0" tIns="0" rIns="0" bIns="0" rtlCol="0" anchor="ctr"/>
+          <a:lstStyle/>
+          <a:p>
+            <a:pPr algn="l" indent="0" marL="0">
+              <a:buNone/>
+            </a:pPr>
+            <a:r>
+              <a:rPr lang="en-US" sz="780" dirty="0">
+                <a:solidFill>
+                  <a:srgbClr val="3A3A3A"/>
+                </a:solidFill>
+                <a:latin typeface="Calibri" pitchFamily="34" charset="0"/>
+                <a:ea typeface="Calibri" pitchFamily="34" charset="-122"/>
+                <a:cs typeface="Calibri" pitchFamily="34" charset="-120"/>
+              </a:rPr>
+              <a:t>enewable/public/&gt;</a:t>
+            </a:r>
+            <a:endParaRPr lang="en-US" sz="780" dirty="0"/>
+          </a:p>
+        </p:txBody>
+      </p:sp>
+      <p:sp>
+        <p:nvSpPr>
+          <p:cNvPr id="17" name="Shape 15"/>
+          <p:cNvSpPr/>
+          <p:nvPr/>
+        </p:nvSpPr>
+        <p:spPr>
+          <a:xfrm>
+            <a:off x="603504" y="3584448"/>
+            <a:ext cx="91440" cy="91440"/>
+          </a:xfrm>
+          <a:prstGeom prst="ellipse">
+            <a:avLst/>
+          </a:prstGeom>
+          <a:solidFill>
+            <a:srgbClr val="093B5F"/>
+          </a:solidFill>
+          <a:ln/>
+        </p:spPr>
+      </p:sp>
+      <p:sp>
+        <p:nvSpPr>
+          <p:cNvPr id="18" name="Text 16"/>
+          <p:cNvSpPr txBox="1"/>
+          <p:nvPr/>
+        </p:nvSpPr>
+        <p:spPr>
+          <a:xfrm>
+            <a:off x="768096" y="3538728"/>
+            <a:ext cx="1545336" cy="201168"/>
+          </a:xfrm>
+          <a:prstGeom prst="rect">
+            <a:avLst/>
+          </a:prstGeom>
+          <a:noFill/>
+          <a:ln/>
+        </p:spPr>
+        <p:txBody>
+          <a:bodyPr wrap="square" lIns="0" tIns="0" rIns="0" bIns="0" rtlCol="0" anchor="ctr"/>
+          <a:lstStyle/>
+          <a:p>
+            <a:pPr algn="l" indent="0" marL="0">
+              <a:buNone/>
+            </a:pPr>
+            <a:r>
+              <a:rPr lang="en-US" sz="780" dirty="0">
+                <a:solidFill>
+                  <a:srgbClr val="3A3A3A"/>
+                </a:solidFill>
+                <a:latin typeface="Calibri" pitchFamily="34" charset="0"/>
+                <a:ea typeface="Calibri" pitchFamily="34" charset="-122"/>
+                <a:cs typeface="Calibri" pitchFamily="34" charset="-120"/>
+              </a:rPr>
+              <a:t>enewable/eu/ops/&gt;</a:t>
+            </a:r>
+            <a:endParaRPr lang="en-US" sz="780" dirty="0"/>
+          </a:p>
+        </p:txBody>
+      </p:sp>
+      <p:sp>
+        <p:nvSpPr>
+          <p:cNvPr id="19" name="Shape 17"/>
+          <p:cNvSpPr/>
+          <p:nvPr/>
+        </p:nvSpPr>
+        <p:spPr>
+          <a:xfrm>
+            <a:off x="603504" y="3822192"/>
+            <a:ext cx="91440" cy="91440"/>
+          </a:xfrm>
+          <a:prstGeom prst="ellipse">
+            <a:avLst/>
+          </a:prstGeom>
+          <a:solidFill>
+            <a:srgbClr val="FCA829"/>
+          </a:solidFill>
+          <a:ln/>
+        </p:spPr>
+      </p:sp>
+      <p:sp>
+        <p:nvSpPr>
+          <p:cNvPr id="20" name="Text 18"/>
+          <p:cNvSpPr txBox="1"/>
+          <p:nvPr/>
+        </p:nvSpPr>
+        <p:spPr>
+          <a:xfrm>
+            <a:off x="768096" y="3776472"/>
+            <a:ext cx="1545336" cy="201168"/>
+          </a:xfrm>
+          <a:prstGeom prst="rect">
+            <a:avLst/>
+          </a:prstGeom>
+          <a:noFill/>
+          <a:ln/>
+        </p:spPr>
+        <p:txBody>
+          <a:bodyPr wrap="square" lIns="0" tIns="0" rIns="0" bIns="0" rtlCol="0" anchor="ctr"/>
+          <a:lstStyle/>
+          <a:p>
+            <a:pPr algn="l" indent="0" marL="0">
+              <a:buNone/>
+            </a:pPr>
+            <a:r>
+              <a:rPr lang="en-US" sz="780" dirty="0">
+                <a:solidFill>
+                  <a:srgbClr val="3A3A3A"/>
+                </a:solidFill>
+                <a:latin typeface="Calibri" pitchFamily="34" charset="0"/>
+                <a:ea typeface="Calibri" pitchFamily="34" charset="-122"/>
+                <a:cs typeface="Calibri" pitchFamily="34" charset="-120"/>
+              </a:rPr>
+              <a:t>enewable/eu/pii/&gt;</a:t>
+            </a:r>
+            <a:endParaRPr lang="en-US" sz="780" dirty="0"/>
+          </a:p>
+        </p:txBody>
+      </p:sp>
+      <p:sp>
+        <p:nvSpPr>
+          <p:cNvPr id="21" name="Shape 19"/>
+          <p:cNvSpPr/>
+          <p:nvPr/>
+        </p:nvSpPr>
+        <p:spPr>
+          <a:xfrm>
+            <a:off x="457200" y="4206240"/>
+            <a:ext cx="1965960" cy="1234440"/>
+          </a:xfrm>
+          <a:prstGeom prst="roundRect">
+            <a:avLst>
+              <a:gd name="adj" fmla="val 7407"/>
+            </a:avLst>
+          </a:prstGeom>
+          <a:solidFill>
+            <a:srgbClr val="FFFFFF"/>
+          </a:solidFill>
+          <a:ln w="15875">
+            <a:solidFill>
+              <a:srgbClr val="093B5F"/>
+            </a:solidFill>
+            <a:prstDash val="solid"/>
+          </a:ln>
+        </p:spPr>
+      </p:sp>
+      <p:sp>
+        <p:nvSpPr>
+          <p:cNvPr id="22" name="Text 20"/>
+          <p:cNvSpPr txBox="1"/>
+          <p:nvPr/>
+        </p:nvSpPr>
+        <p:spPr>
+          <a:xfrm>
+            <a:off x="566928" y="4297680"/>
+            <a:ext cx="1746504" cy="292608"/>
+          </a:xfrm>
+          <a:prstGeom prst="rect">
+            <a:avLst/>
+          </a:prstGeom>
+          <a:noFill/>
+          <a:ln/>
+        </p:spPr>
+        <p:txBody>
+          <a:bodyPr wrap="square" lIns="0" tIns="0" rIns="0" bIns="0" rtlCol="0" anchor="ctr"/>
+          <a:lstStyle/>
+          <a:p>
+            <a:pPr algn="ctr" indent="0" marL="0">
+              <a:buNone/>
+            </a:pPr>
+            <a:r>
+              <a:rPr lang="en-US" sz="1200" b="1" dirty="0">
+                <a:solidFill>
+                  <a:srgbClr val="093B5F"/>
+                </a:solidFill>
+                <a:latin typeface="Calibri" pitchFamily="34" charset="0"/>
+                <a:ea typeface="Calibri" pitchFamily="34" charset="-122"/>
+                <a:cs typeface="Calibri" pitchFamily="34" charset="-120"/>
+              </a:rPr>
+              <a:t>SDKPerf</a:t>
+            </a:r>
+            <a:endParaRPr lang="en-US" sz="1200" dirty="0"/>
+          </a:p>
+        </p:txBody>
+      </p:sp>
+      <p:sp>
+        <p:nvSpPr>
+          <p:cNvPr id="23" name="Shape 21"/>
+          <p:cNvSpPr/>
+          <p:nvPr/>
+        </p:nvSpPr>
+        <p:spPr>
+          <a:xfrm>
+            <a:off x="594360" y="4626864"/>
+            <a:ext cx="1691640" cy="0"/>
+          </a:xfrm>
+          <a:prstGeom prst="line">
+            <a:avLst/>
+          </a:prstGeom>
+          <a:noFill/>
+          <a:ln w="9525">
+            <a:solidFill>
+              <a:srgbClr val="D6D6D6"/>
+            </a:solidFill>
+            <a:prstDash val="solid"/>
+          </a:ln>
+        </p:spPr>
+      </p:sp>
+      <p:sp>
+        <p:nvSpPr>
+          <p:cNvPr id="24" name="Shape 22"/>
+          <p:cNvSpPr/>
+          <p:nvPr/>
+        </p:nvSpPr>
+        <p:spPr>
+          <a:xfrm>
+            <a:off x="603504" y="4764024"/>
+            <a:ext cx="91440" cy="91440"/>
+          </a:xfrm>
+          <a:prstGeom prst="ellipse">
+            <a:avLst/>
+          </a:prstGeom>
+          <a:solidFill>
+            <a:srgbClr val="00C895"/>
+          </a:solidFill>
+          <a:ln/>
+        </p:spPr>
+      </p:sp>
+      <p:sp>
+        <p:nvSpPr>
+          <p:cNvPr id="25" name="Text 23"/>
+          <p:cNvSpPr txBox="1"/>
+          <p:nvPr/>
+        </p:nvSpPr>
+        <p:spPr>
+          <a:xfrm>
+            <a:off x="768096" y="4718304"/>
+            <a:ext cx="1545336" cy="201168"/>
+          </a:xfrm>
+          <a:prstGeom prst="rect">
+            <a:avLst/>
+          </a:prstGeom>
+          <a:noFill/>
+          <a:ln/>
+        </p:spPr>
+        <p:txBody>
+          <a:bodyPr wrap="square" lIns="0" tIns="0" rIns="0" bIns="0" rtlCol="0" anchor="ctr"/>
+          <a:lstStyle/>
+          <a:p>
+            <a:pPr algn="l" indent="0" marL="0">
+              <a:buNone/>
+            </a:pPr>
+            <a:r>
+              <a:rPr lang="en-US" sz="780" dirty="0">
+                <a:solidFill>
+                  <a:srgbClr val="3A3A3A"/>
+                </a:solidFill>
+                <a:latin typeface="Calibri" pitchFamily="34" charset="0"/>
+                <a:ea typeface="Calibri" pitchFamily="34" charset="-122"/>
+                <a:cs typeface="Calibri" pitchFamily="34" charset="-120"/>
+              </a:rPr>
+              <a:t>enewable/public/&gt;</a:t>
+            </a:r>
+            <a:endParaRPr lang="en-US" sz="780" dirty="0"/>
+          </a:p>
+        </p:txBody>
+      </p:sp>
+      <p:sp>
+        <p:nvSpPr>
+          <p:cNvPr id="26" name="Shape 24"/>
+          <p:cNvSpPr/>
+          <p:nvPr/>
+        </p:nvSpPr>
+        <p:spPr>
+          <a:xfrm>
+            <a:off x="603504" y="5001768"/>
+            <a:ext cx="91440" cy="91440"/>
+          </a:xfrm>
+          <a:prstGeom prst="ellipse">
+            <a:avLst/>
+          </a:prstGeom>
+          <a:solidFill>
+            <a:srgbClr val="093B5F"/>
+          </a:solidFill>
+          <a:ln/>
+        </p:spPr>
+      </p:sp>
+      <p:sp>
+        <p:nvSpPr>
+          <p:cNvPr id="27" name="Text 25"/>
+          <p:cNvSpPr txBox="1"/>
+          <p:nvPr/>
+        </p:nvSpPr>
+        <p:spPr>
+          <a:xfrm>
+            <a:off x="768096" y="4956048"/>
+            <a:ext cx="1545336" cy="201168"/>
+          </a:xfrm>
+          <a:prstGeom prst="rect">
+            <a:avLst/>
+          </a:prstGeom>
+          <a:noFill/>
+          <a:ln/>
+        </p:spPr>
+        <p:txBody>
+          <a:bodyPr wrap="square" lIns="0" tIns="0" rIns="0" bIns="0" rtlCol="0" anchor="ctr"/>
+          <a:lstStyle/>
+          <a:p>
+            <a:pPr algn="l" indent="0" marL="0">
+              <a:buNone/>
+            </a:pPr>
+            <a:r>
+              <a:rPr lang="en-US" sz="780" dirty="0">
+                <a:solidFill>
+                  <a:srgbClr val="3A3A3A"/>
+                </a:solidFill>
+                <a:latin typeface="Calibri" pitchFamily="34" charset="0"/>
+                <a:ea typeface="Calibri" pitchFamily="34" charset="-122"/>
+                <a:cs typeface="Calibri" pitchFamily="34" charset="-120"/>
+              </a:rPr>
+              <a:t>enewable/eu/ops/&gt;</a:t>
+            </a:r>
+            <a:endParaRPr lang="en-US" sz="780" dirty="0"/>
+          </a:p>
+        </p:txBody>
+      </p:sp>
+      <p:sp>
+        <p:nvSpPr>
+          <p:cNvPr id="28" name="Shape 26"/>
+          <p:cNvSpPr/>
+          <p:nvPr/>
+        </p:nvSpPr>
+        <p:spPr>
+          <a:xfrm>
+            <a:off x="603504" y="5239512"/>
+            <a:ext cx="91440" cy="91440"/>
+          </a:xfrm>
+          <a:prstGeom prst="ellipse">
+            <a:avLst/>
+          </a:prstGeom>
+          <a:solidFill>
+            <a:srgbClr val="FCA829"/>
+          </a:solidFill>
+          <a:ln/>
+        </p:spPr>
+      </p:sp>
+      <p:sp>
+        <p:nvSpPr>
+          <p:cNvPr id="29" name="Text 27"/>
+          <p:cNvSpPr txBox="1"/>
+          <p:nvPr/>
+        </p:nvSpPr>
+        <p:spPr>
+          <a:xfrm>
+            <a:off x="768096" y="5193792"/>
+            <a:ext cx="1545336" cy="201168"/>
+          </a:xfrm>
+          <a:prstGeom prst="rect">
+            <a:avLst/>
+          </a:prstGeom>
+          <a:noFill/>
+          <a:ln/>
+        </p:spPr>
+        <p:txBody>
+          <a:bodyPr wrap="square" lIns="0" tIns="0" rIns="0" bIns="0" rtlCol="0" anchor="ctr"/>
+          <a:lstStyle/>
+          <a:p>
+            <a:pPr algn="l" indent="0" marL="0">
+              <a:buNone/>
+            </a:pPr>
+            <a:r>
+              <a:rPr lang="en-US" sz="780" dirty="0">
+                <a:solidFill>
+                  <a:srgbClr val="3A3A3A"/>
+                </a:solidFill>
+                <a:latin typeface="Calibri" pitchFamily="34" charset="0"/>
+                <a:ea typeface="Calibri" pitchFamily="34" charset="-122"/>
+                <a:cs typeface="Calibri" pitchFamily="34" charset="-120"/>
+              </a:rPr>
+              <a:t>enewable/eu/pii/&gt;</a:t>
+            </a:r>
+            <a:endParaRPr lang="en-US" sz="780" dirty="0"/>
+          </a:p>
+        </p:txBody>
+      </p:sp>
+      <p:sp>
+        <p:nvSpPr>
+          <p:cNvPr id="30" name="Text 28"/>
+          <p:cNvSpPr txBox="1"/>
+          <p:nvPr/>
+        </p:nvSpPr>
+        <p:spPr>
+          <a:xfrm>
+            <a:off x="457200" y="5495544"/>
+            <a:ext cx="1965960" cy="548640"/>
+          </a:xfrm>
+          <a:prstGeom prst="rect">
+            <a:avLst/>
+          </a:prstGeom>
+          <a:noFill/>
+          <a:ln/>
+        </p:spPr>
+        <p:txBody>
+          <a:bodyPr wrap="square" lIns="0" tIns="0" rIns="0" bIns="0" rtlCol="0" anchor="t"/>
+          <a:lstStyle/>
+          <a:p>
+            <a:pPr algn="l" indent="0" marL="0">
+              <a:lnSpc>
+                <a:spcPct val="105000"/>
+              </a:lnSpc>
+              <a:buNone/>
+            </a:pPr>
+            <a:r>
+              <a:rPr lang="en-US" sz="800" i="1" dirty="0">
+                <a:solidFill>
+                  <a:srgbClr val="6A6A6A"/>
+                </a:solidFill>
+                <a:latin typeface="Calibri" pitchFamily="34" charset="0"/>
+                <a:ea typeface="Calibri" pitchFamily="34" charset="-122"/>
+                <a:cs typeface="Calibri" pitchFamily="34" charset="-120"/>
+              </a:rPr>
+              <a:t>elke app publiceert DIRECT op alle 3 topic-subtrees, elk met een eigen ACL-gescoped identiteit</a:t>
+            </a:r>
+            <a:endParaRPr lang="en-US" sz="800" dirty="0"/>
+          </a:p>
+        </p:txBody>
+      </p:sp>
+      <p:sp>
+        <p:nvSpPr>
+          <p:cNvPr id="31" name="Shape 29"/>
+          <p:cNvSpPr/>
+          <p:nvPr/>
+        </p:nvSpPr>
+        <p:spPr>
+          <a:xfrm>
+            <a:off x="2697480" y="1371600"/>
+            <a:ext cx="1645920" cy="4069080"/>
+          </a:xfrm>
+          <a:prstGeom prst="roundRect">
+            <a:avLst>
+              <a:gd name="adj" fmla="val 6667"/>
             </a:avLst>
           </a:prstGeom>
           <a:solidFill>
@@ -6765,14 +7605,14 @@
       </p:sp>
       <p:sp>
         <p:nvSpPr>
-          <p:cNvPr id="4" name="Text 2"/>
-          <p:cNvSpPr txBox="1"/>
-          <p:nvPr/>
-        </p:nvSpPr>
-        <p:spPr>
-          <a:xfrm>
-            <a:off x="640080" y="2057400"/>
-            <a:ext cx="3017520" cy="365760"/>
+          <p:cNvPr id="32" name="Text 30"/>
+          <p:cNvSpPr txBox="1"/>
+          <p:nvPr/>
+        </p:nvSpPr>
+        <p:spPr>
+          <a:xfrm>
+            <a:off x="2788920" y="1508760"/>
+            <a:ext cx="1463040" cy="365760"/>
           </a:xfrm>
           <a:prstGeom prst="rect">
             <a:avLst/>
@@ -6788,7 +7628,7 @@
               <a:buNone/>
             </a:pPr>
             <a:r>
-              <a:rPr lang="en-US" sz="1400" b="1" dirty="0">
+              <a:rPr lang="en-US" sz="1300" b="1" dirty="0">
                 <a:solidFill>
                   <a:srgbClr val="093B5F"/>
                 </a:solidFill>
@@ -6798,36 +7638,39 @@
               </a:rPr>
               <a:t>Lokale broker</a:t>
             </a:r>
-            <a:endParaRPr lang="en-US" sz="1400" dirty="0"/>
-          </a:p>
-        </p:txBody>
-      </p:sp>
-      <p:sp>
-        <p:nvSpPr>
-          <p:cNvPr id="5" name="Text 3"/>
-          <p:cNvSpPr txBox="1"/>
-          <p:nvPr/>
-        </p:nvSpPr>
-        <p:spPr>
-          <a:xfrm>
-            <a:off x="640080" y="2423160"/>
-            <a:ext cx="3017520" cy="274320"/>
-          </a:xfrm>
-          <a:prstGeom prst="rect">
-            <a:avLst/>
-          </a:prstGeom>
-          <a:noFill/>
-          <a:ln/>
-        </p:spPr>
-        <p:txBody>
-          <a:bodyPr wrap="square" lIns="0" tIns="0" rIns="0" bIns="0" rtlCol="0" anchor="ctr"/>
+            <a:endParaRPr lang="en-US" sz="1300" dirty="0"/>
+          </a:p>
+        </p:txBody>
+      </p:sp>
+      <p:sp>
+        <p:nvSpPr>
+          <p:cNvPr id="33" name="Text 31"/>
+          <p:cNvSpPr txBox="1"/>
+          <p:nvPr/>
+        </p:nvSpPr>
+        <p:spPr>
+          <a:xfrm>
+            <a:off x="2788920" y="1883664"/>
+            <a:ext cx="1463040" cy="502920"/>
+          </a:xfrm>
+          <a:prstGeom prst="rect">
+            <a:avLst/>
+          </a:prstGeom>
+          <a:noFill/>
+          <a:ln/>
+        </p:spPr>
+        <p:txBody>
+          <a:bodyPr wrap="square" lIns="0" tIns="0" rIns="0" bIns="0" rtlCol="0" anchor="t"/>
           <a:lstStyle/>
           <a:p>
             <a:pPr algn="ctr" indent="0" marL="0">
-              <a:buNone/>
-            </a:pPr>
-            <a:r>
-              <a:rPr lang="en-US" sz="950" dirty="0">
+              <a:lnSpc>
+                <a:spcPct val="110000"/>
+              </a:lnSpc>
+              <a:buNone/>
+            </a:pPr>
+            <a:r>
+              <a:rPr lang="en-US" sz="900" dirty="0">
                 <a:solidFill>
                   <a:srgbClr val="6A6A6A"/>
                 </a:solidFill>
@@ -6837,32 +7680,28 @@
               </a:rPr>
               <a:t>self-managed · Docker · VPN enewable</a:t>
             </a:r>
-            <a:endParaRPr lang="en-US" sz="950" dirty="0"/>
-          </a:p>
-        </p:txBody>
-      </p:sp>
-      <p:sp>
-        <p:nvSpPr>
-          <p:cNvPr id="6" name="Shape 4"/>
+            <a:endParaRPr lang="en-US" sz="900" dirty="0"/>
+          </a:p>
+        </p:txBody>
+      </p:sp>
+      <p:sp>
+        <p:nvSpPr>
+          <p:cNvPr id="34" name="Shape 32"/>
           <p:cNvSpPr/>
           <p:nvPr/>
         </p:nvSpPr>
         <p:spPr>
           <a:xfrm>
-            <a:off x="914400" y="2816352"/>
-            <a:ext cx="2468880" cy="512064"/>
-          </a:xfrm>
-          <a:prstGeom prst="roundRect">
-            <a:avLst>
-              <a:gd name="adj" fmla="val 14286"/>
-            </a:avLst>
-          </a:prstGeom>
-          <a:solidFill>
-            <a:srgbClr val="FFFFFF"/>
-          </a:solidFill>
-          <a:ln w="12700">
+            <a:off x="2834640" y="2514600"/>
+            <a:ext cx="1371600" cy="0"/>
+          </a:xfrm>
+          <a:prstGeom prst="line">
+            <a:avLst/>
+          </a:prstGeom>
+          <a:noFill/>
+          <a:ln w="9525">
             <a:solidFill>
-              <a:srgbClr val="093B5F"/>
+              <a:srgbClr val="D6D6D6"/>
             </a:solidFill>
             <a:prstDash val="solid"/>
           </a:ln>
@@ -6870,231 +7709,132 @@
       </p:sp>
       <p:sp>
         <p:nvSpPr>
-          <p:cNvPr id="7" name="Text 5"/>
-          <p:cNvSpPr txBox="1"/>
-          <p:nvPr/>
-        </p:nvSpPr>
-        <p:spPr>
-          <a:xfrm>
-            <a:off x="914400" y="2816352"/>
-            <a:ext cx="2468880" cy="512064"/>
-          </a:xfrm>
-          <a:prstGeom prst="rect">
-            <a:avLst/>
-          </a:prstGeom>
-          <a:noFill/>
-          <a:ln/>
-        </p:spPr>
-        <p:txBody>
-          <a:bodyPr wrap="square" lIns="0" tIns="0" rIns="0" bIns="0" rtlCol="0" anchor="ctr"/>
+          <p:cNvPr id="35" name="Text 33"/>
+          <p:cNvSpPr txBox="1"/>
+          <p:nvPr/>
+        </p:nvSpPr>
+        <p:spPr>
+          <a:xfrm>
+            <a:off x="2834640" y="2651760"/>
+            <a:ext cx="1371600" cy="2651760"/>
+          </a:xfrm>
+          <a:prstGeom prst="rect">
+            <a:avLst/>
+          </a:prstGeom>
+          <a:noFill/>
+          <a:ln/>
+        </p:spPr>
+        <p:txBody>
+          <a:bodyPr wrap="square" lIns="0" tIns="0" rIns="0" bIns="0" rtlCol="0" anchor="t"/>
           <a:lstStyle/>
           <a:p>
             <a:pPr algn="ctr" indent="0" marL="0">
-              <a:buNone/>
-            </a:pPr>
-            <a:r>
-              <a:rPr lang="en-US" sz="1100" b="1" dirty="0">
-                <a:solidFill>
-                  <a:srgbClr val="093B5F"/>
-                </a:solidFill>
-                <a:latin typeface="Calibri" pitchFamily="34" charset="0"/>
-                <a:ea typeface="Calibri" pitchFamily="34" charset="-122"/>
-                <a:cs typeface="Calibri" pitchFamily="34" charset="-120"/>
-              </a:rPr>
-              <a:t>stm CLI</a:t>
-            </a:r>
-            <a:endParaRPr lang="en-US" sz="1100" dirty="0"/>
-          </a:p>
-        </p:txBody>
-      </p:sp>
-      <p:sp>
-        <p:nvSpPr>
-          <p:cNvPr id="8" name="Shape 6"/>
+              <a:lnSpc>
+                <a:spcPct val="115000"/>
+              </a:lnSpc>
+              <a:buNone/>
+            </a:pPr>
+            <a:r>
+              <a:rPr lang="en-US" sz="900" dirty="0">
+                <a:solidFill>
+                  <a:srgbClr val="3A3A3A"/>
+                </a:solidFill>
+                <a:latin typeface="Calibri" pitchFamily="34" charset="0"/>
+                <a:ea typeface="Calibri" pitchFamily="34" charset="-122"/>
+                <a:cs typeface="Calibri" pitchFamily="34" charset="-120"/>
+              </a:rPr>
+              <a:t>Handhaaft per-publisher ACL-scoping, spoolt op 3 gescheiden guaranteed queues en exporteert elk exact 1-op-1 via een eigen REST Delivery Point.</a:t>
+            </a:r>
+            <a:endParaRPr lang="en-US" sz="900" dirty="0"/>
+          </a:p>
+        </p:txBody>
+      </p:sp>
+      <p:sp>
+        <p:nvSpPr>
+          <p:cNvPr id="36" name="Shape 34"/>
           <p:cNvSpPr/>
           <p:nvPr/>
         </p:nvSpPr>
         <p:spPr>
           <a:xfrm>
-            <a:off x="914400" y="3474720"/>
-            <a:ext cx="2468880" cy="512064"/>
+            <a:off x="2496312" y="1988820"/>
+            <a:ext cx="128016" cy="0"/>
+          </a:xfrm>
+          <a:prstGeom prst="line">
+            <a:avLst/>
+          </a:prstGeom>
+          <a:noFill/>
+          <a:ln w="34925">
+            <a:solidFill>
+              <a:srgbClr val="9AA7B0"/>
+            </a:solidFill>
+            <a:prstDash val="solid"/>
+            <a:tailEnd type="triangle"/>
+          </a:ln>
+        </p:spPr>
+      </p:sp>
+      <p:sp>
+        <p:nvSpPr>
+          <p:cNvPr id="37" name="Shape 35"/>
+          <p:cNvSpPr/>
+          <p:nvPr/>
+        </p:nvSpPr>
+        <p:spPr>
+          <a:xfrm>
+            <a:off x="2496312" y="3406140"/>
+            <a:ext cx="128016" cy="0"/>
+          </a:xfrm>
+          <a:prstGeom prst="line">
+            <a:avLst/>
+          </a:prstGeom>
+          <a:noFill/>
+          <a:ln w="34925">
+            <a:solidFill>
+              <a:srgbClr val="9AA7B0"/>
+            </a:solidFill>
+            <a:prstDash val="solid"/>
+            <a:tailEnd type="triangle"/>
+          </a:ln>
+        </p:spPr>
+      </p:sp>
+      <p:sp>
+        <p:nvSpPr>
+          <p:cNvPr id="38" name="Shape 36"/>
+          <p:cNvSpPr/>
+          <p:nvPr/>
+        </p:nvSpPr>
+        <p:spPr>
+          <a:xfrm>
+            <a:off x="2496312" y="4823460"/>
+            <a:ext cx="128016" cy="0"/>
+          </a:xfrm>
+          <a:prstGeom prst="line">
+            <a:avLst/>
+          </a:prstGeom>
+          <a:noFill/>
+          <a:ln w="34925">
+            <a:solidFill>
+              <a:srgbClr val="9AA7B0"/>
+            </a:solidFill>
+            <a:prstDash val="solid"/>
+            <a:tailEnd type="triangle"/>
+          </a:ln>
+        </p:spPr>
+      </p:sp>
+      <p:sp>
+        <p:nvSpPr>
+          <p:cNvPr id="39" name="Shape 37"/>
+          <p:cNvSpPr/>
+          <p:nvPr/>
+        </p:nvSpPr>
+        <p:spPr>
+          <a:xfrm>
+            <a:off x="4709160" y="1371600"/>
+            <a:ext cx="2697480" cy="731520"/>
           </a:xfrm>
           <a:prstGeom prst="roundRect">
             <a:avLst>
-              <a:gd name="adj" fmla="val 14286"/>
-            </a:avLst>
-          </a:prstGeom>
-          <a:solidFill>
-            <a:srgbClr val="FFFFFF"/>
-          </a:solidFill>
-          <a:ln w="12700">
-            <a:solidFill>
-              <a:srgbClr val="093B5F"/>
-            </a:solidFill>
-            <a:prstDash val="solid"/>
-          </a:ln>
-        </p:spPr>
-      </p:sp>
-      <p:sp>
-        <p:nvSpPr>
-          <p:cNvPr id="9" name="Text 7"/>
-          <p:cNvSpPr txBox="1"/>
-          <p:nvPr/>
-        </p:nvSpPr>
-        <p:spPr>
-          <a:xfrm>
-            <a:off x="914400" y="3474720"/>
-            <a:ext cx="2468880" cy="512064"/>
-          </a:xfrm>
-          <a:prstGeom prst="rect">
-            <a:avLst/>
-          </a:prstGeom>
-          <a:noFill/>
-          <a:ln/>
-        </p:spPr>
-        <p:txBody>
-          <a:bodyPr wrap="square" lIns="0" tIns="0" rIns="0" bIns="0" rtlCol="0" anchor="ctr"/>
-          <a:lstStyle/>
-          <a:p>
-            <a:pPr algn="ctr" indent="0" marL="0">
-              <a:buNone/>
-            </a:pPr>
-            <a:r>
-              <a:rPr lang="en-US" sz="1100" b="1" dirty="0">
-                <a:solidFill>
-                  <a:srgbClr val="093B5F"/>
-                </a:solidFill>
-                <a:latin typeface="Calibri" pitchFamily="34" charset="0"/>
-                <a:ea typeface="Calibri" pitchFamily="34" charset="-122"/>
-                <a:cs typeface="Calibri" pitchFamily="34" charset="-120"/>
-              </a:rPr>
-              <a:t>Python-script</a:t>
-            </a:r>
-            <a:endParaRPr lang="en-US" sz="1100" dirty="0"/>
-          </a:p>
-        </p:txBody>
-      </p:sp>
-      <p:sp>
-        <p:nvSpPr>
-          <p:cNvPr id="10" name="Shape 8"/>
-          <p:cNvSpPr/>
-          <p:nvPr/>
-        </p:nvSpPr>
-        <p:spPr>
-          <a:xfrm>
-            <a:off x="914400" y="4133088"/>
-            <a:ext cx="2468880" cy="512064"/>
-          </a:xfrm>
-          <a:prstGeom prst="roundRect">
-            <a:avLst>
-              <a:gd name="adj" fmla="val 14286"/>
-            </a:avLst>
-          </a:prstGeom>
-          <a:solidFill>
-            <a:srgbClr val="FFFFFF"/>
-          </a:solidFill>
-          <a:ln w="12700">
-            <a:solidFill>
-              <a:srgbClr val="093B5F"/>
-            </a:solidFill>
-            <a:prstDash val="solid"/>
-          </a:ln>
-        </p:spPr>
-      </p:sp>
-      <p:sp>
-        <p:nvSpPr>
-          <p:cNvPr id="11" name="Text 9"/>
-          <p:cNvSpPr txBox="1"/>
-          <p:nvPr/>
-        </p:nvSpPr>
-        <p:spPr>
-          <a:xfrm>
-            <a:off x="914400" y="4133088"/>
-            <a:ext cx="2468880" cy="512064"/>
-          </a:xfrm>
-          <a:prstGeom prst="rect">
-            <a:avLst/>
-          </a:prstGeom>
-          <a:noFill/>
-          <a:ln/>
-        </p:spPr>
-        <p:txBody>
-          <a:bodyPr wrap="square" lIns="0" tIns="0" rIns="0" bIns="0" rtlCol="0" anchor="ctr"/>
-          <a:lstStyle/>
-          <a:p>
-            <a:pPr algn="ctr" indent="0" marL="0">
-              <a:buNone/>
-            </a:pPr>
-            <a:r>
-              <a:rPr lang="en-US" sz="1100" b="1" dirty="0">
-                <a:solidFill>
-                  <a:srgbClr val="093B5F"/>
-                </a:solidFill>
-                <a:latin typeface="Calibri" pitchFamily="34" charset="0"/>
-                <a:ea typeface="Calibri" pitchFamily="34" charset="-122"/>
-                <a:cs typeface="Calibri" pitchFamily="34" charset="-120"/>
-              </a:rPr>
-              <a:t>SDKPerf</a:t>
-            </a:r>
-            <a:endParaRPr lang="en-US" sz="1100" dirty="0"/>
-          </a:p>
-        </p:txBody>
-      </p:sp>
-      <p:sp>
-        <p:nvSpPr>
-          <p:cNvPr id="12" name="Text 10"/>
-          <p:cNvSpPr txBox="1"/>
-          <p:nvPr/>
-        </p:nvSpPr>
-        <p:spPr>
-          <a:xfrm>
-            <a:off x="777240" y="4864608"/>
-            <a:ext cx="2743200" cy="502920"/>
-          </a:xfrm>
-          <a:prstGeom prst="rect">
-            <a:avLst/>
-          </a:prstGeom>
-          <a:noFill/>
-          <a:ln/>
-        </p:spPr>
-        <p:txBody>
-          <a:bodyPr wrap="square" lIns="0" tIns="0" rIns="0" bIns="0" rtlCol="0" anchor="t"/>
-          <a:lstStyle/>
-          <a:p>
-            <a:pPr algn="ctr" indent="0" marL="0">
-              <a:lnSpc>
-                <a:spcPct val="105000"/>
-              </a:lnSpc>
-              <a:buNone/>
-            </a:pPr>
-            <a:r>
-              <a:rPr lang="en-US" sz="850" i="1" dirty="0">
-                <a:solidFill>
-                  <a:srgbClr val="6A6A6A"/>
-                </a:solidFill>
-                <a:latin typeface="Calibri" pitchFamily="34" charset="0"/>
-                <a:ea typeface="Calibri" pitchFamily="34" charset="-122"/>
-                <a:cs typeface="Calibri" pitchFamily="34" charset="-120"/>
-              </a:rPr>
-              <a:t>elk publiceert DIRECT, op alle 3 topic-subtrees, elk met een eigen ACL-gescoped identiteit</a:t>
-            </a:r>
-            <a:endParaRPr lang="en-US" sz="850" dirty="0"/>
-          </a:p>
-        </p:txBody>
-      </p:sp>
-      <p:sp>
-        <p:nvSpPr>
-          <p:cNvPr id="13" name="Shape 11"/>
-          <p:cNvSpPr/>
-          <p:nvPr/>
-        </p:nvSpPr>
-        <p:spPr>
-          <a:xfrm>
-            <a:off x="8503920" y="1920240"/>
-            <a:ext cx="3063240" cy="914400"/>
-          </a:xfrm>
-          <a:prstGeom prst="roundRect">
-            <a:avLst>
-              <a:gd name="adj" fmla="val 10000"/>
+              <a:gd name="adj" fmla="val 12500"/>
             </a:avLst>
           </a:prstGeom>
           <a:solidFill>
@@ -7110,14 +7850,14 @@
       </p:sp>
       <p:sp>
         <p:nvSpPr>
-          <p:cNvPr id="14" name="Text 12"/>
-          <p:cNvSpPr txBox="1"/>
-          <p:nvPr/>
-        </p:nvSpPr>
-        <p:spPr>
-          <a:xfrm>
-            <a:off x="8641080" y="2029968"/>
-            <a:ext cx="2788920" cy="365760"/>
+          <p:cNvPr id="40" name="Text 38"/>
+          <p:cNvSpPr txBox="1"/>
+          <p:nvPr/>
+        </p:nvSpPr>
+        <p:spPr>
+          <a:xfrm>
+            <a:off x="4818888" y="1444752"/>
+            <a:ext cx="2478024" cy="274320"/>
           </a:xfrm>
           <a:prstGeom prst="rect">
             <a:avLst/>
@@ -7133,7 +7873,7 @@
               <a:buNone/>
             </a:pPr>
             <a:r>
-              <a:rPr lang="en-US" sz="1300" b="1" dirty="0">
+              <a:rPr lang="en-US" sz="1250" b="1" dirty="0">
                 <a:solidFill>
                   <a:srgbClr val="093B5F"/>
                 </a:solidFill>
@@ -7143,20 +7883,20 @@
               </a:rPr>
               <a:t>AWS — US East</a:t>
             </a:r>
-            <a:endParaRPr lang="en-US" sz="1300" dirty="0"/>
-          </a:p>
-        </p:txBody>
-      </p:sp>
-      <p:sp>
-        <p:nvSpPr>
-          <p:cNvPr id="15" name="Text 13"/>
-          <p:cNvSpPr txBox="1"/>
-          <p:nvPr/>
-        </p:nvSpPr>
-        <p:spPr>
-          <a:xfrm>
-            <a:off x="8641080" y="2395728"/>
-            <a:ext cx="2788920" cy="329184"/>
+            <a:endParaRPr lang="en-US" sz="1250" dirty="0"/>
+          </a:p>
+        </p:txBody>
+      </p:sp>
+      <p:sp>
+        <p:nvSpPr>
+          <p:cNvPr id="41" name="Text 39"/>
+          <p:cNvSpPr txBox="1"/>
+          <p:nvPr/>
+        </p:nvSpPr>
+        <p:spPr>
+          <a:xfrm>
+            <a:off x="4818888" y="1737360"/>
+            <a:ext cx="2478024" cy="310896"/>
           </a:xfrm>
           <a:prstGeom prst="rect">
             <a:avLst/>
@@ -7169,13 +7909,10 @@
           <a:lstStyle/>
           <a:p>
             <a:pPr algn="ctr" indent="0" marL="0">
-              <a:lnSpc>
-                <a:spcPct val="105000"/>
-              </a:lnSpc>
-              <a:buNone/>
-            </a:pPr>
-            <a:r>
-              <a:rPr lang="en-US" sz="950" dirty="0">
+              <a:buNone/>
+            </a:pPr>
+            <a:r>
+              <a:rPr lang="en-US" sz="900" dirty="0">
                 <a:solidFill>
                   <a:srgbClr val="3A3A3A"/>
                 </a:solidFill>
@@ -7183,46 +7920,89 @@
                 <a:ea typeface="Calibri" pitchFamily="34" charset="-122"/>
                 <a:cs typeface="Calibri" pitchFamily="34" charset="-120"/>
               </a:rPr>
-              <a:t>enewable/public/&gt;</a:t>
-            </a:r>
-            <a:endParaRPr lang="en-US" sz="950" dirty="0"/>
-          </a:p>
+              <a:t>Developer 100, public cluster</a:t>
+            </a:r>
+            <a:endParaRPr lang="en-US" sz="900" dirty="0"/>
+          </a:p>
+        </p:txBody>
+      </p:sp>
+      <p:sp>
+        <p:nvSpPr>
+          <p:cNvPr id="42" name="Text 40"/>
+          <p:cNvSpPr txBox="1"/>
+          <p:nvPr/>
+        </p:nvSpPr>
+        <p:spPr>
+          <a:xfrm>
+            <a:off x="4709160" y="2157984"/>
+            <a:ext cx="2697480" cy="237744"/>
+          </a:xfrm>
+          <a:prstGeom prst="rect">
+            <a:avLst/>
+          </a:prstGeom>
+          <a:noFill/>
+          <a:ln/>
+        </p:spPr>
+        <p:txBody>
+          <a:bodyPr wrap="square" lIns="0" tIns="0" rIns="0" bIns="0" rtlCol="0" anchor="ctr"/>
+          <a:lstStyle/>
           <a:p>
             <a:pPr algn="ctr" indent="0" marL="0">
-              <a:lnSpc>
-                <a:spcPct val="105000"/>
-              </a:lnSpc>
-              <a:buNone/>
-            </a:pPr>
-            <a:r>
-              <a:rPr lang="en-US" sz="950" dirty="0">
-                <a:solidFill>
-                  <a:srgbClr val="3A3A3A"/>
-                </a:solidFill>
-                <a:latin typeface="Calibri" pitchFamily="34" charset="0"/>
-                <a:ea typeface="Calibri" pitchFamily="34" charset="-122"/>
-                <a:cs typeface="Calibri" pitchFamily="34" charset="-120"/>
-              </a:rPr>
-              <a:t>Developer 100, public cluster</a:t>
-            </a:r>
-            <a:endParaRPr lang="en-US" sz="950" dirty="0"/>
-          </a:p>
-        </p:txBody>
-      </p:sp>
-      <p:sp>
-        <p:nvSpPr>
-          <p:cNvPr id="16" name="Shape 14"/>
+              <a:buNone/>
+            </a:pPr>
+            <a:r>
+              <a:rPr lang="en-US" sz="900" b="1" dirty="0">
+                <a:solidFill>
+                  <a:srgbClr val="00C895"/>
+                </a:solidFill>
+                <a:latin typeface="Calibri" pitchFamily="34" charset="0"/>
+                <a:ea typeface="Calibri" pitchFamily="34" charset="-122"/>
+                <a:cs typeface="Calibri" pitchFamily="34" charset="-120"/>
+              </a:rPr>
+              <a:t>RDP: enewable/public/&gt;</a:t>
+            </a:r>
+            <a:endParaRPr lang="en-US" sz="900" dirty="0"/>
+          </a:p>
+        </p:txBody>
+      </p:sp>
+      <p:pic>
+        <p:nvPicPr>
+          <p:cNvPr id="43" name="Image 0" descr="/tmp/claude-0/-home-claude/53d1957b-c130-5537-9581-24f9dd54b40e/scratchpad/pptx-build/assets/na_continent.png">    </p:cNvPr>
+          <p:cNvPicPr>
+            <a:picLocks noChangeAspect="1"/>
+          </p:cNvPicPr>
+          <p:nvPr/>
+        </p:nvPicPr>
+        <p:blipFill>
+          <a:blip r:embed="rId1"/>
+          <a:stretch>
+            <a:fillRect/>
+          </a:stretch>
+        </p:blipFill>
+        <p:spPr>
+          <a:xfrm>
+            <a:off x="4754880" y="2532888"/>
+            <a:ext cx="2606040" cy="3226526"/>
+          </a:xfrm>
+          <a:prstGeom prst="rect">
+            <a:avLst/>
+          </a:prstGeom>
+        </p:spPr>
+      </p:pic>
+      <p:sp>
+        <p:nvSpPr>
+          <p:cNvPr id="44" name="Shape 41"/>
           <p:cNvSpPr/>
           <p:nvPr/>
         </p:nvSpPr>
         <p:spPr>
           <a:xfrm>
-            <a:off x="8503920" y="3063240"/>
-            <a:ext cx="3063240" cy="914400"/>
+            <a:off x="8001000" y="2331720"/>
+            <a:ext cx="3749040" cy="731520"/>
           </a:xfrm>
           <a:prstGeom prst="roundRect">
             <a:avLst>
-              <a:gd name="adj" fmla="val 10000"/>
+              <a:gd name="adj" fmla="val 12500"/>
             </a:avLst>
           </a:prstGeom>
           <a:solidFill>
@@ -7238,14 +8018,14 @@
       </p:sp>
       <p:sp>
         <p:nvSpPr>
-          <p:cNvPr id="17" name="Text 15"/>
-          <p:cNvSpPr txBox="1"/>
-          <p:nvPr/>
-        </p:nvSpPr>
-        <p:spPr>
-          <a:xfrm>
-            <a:off x="8641080" y="3172968"/>
-            <a:ext cx="2788920" cy="365760"/>
+          <p:cNvPr id="45" name="Text 42"/>
+          <p:cNvSpPr txBox="1"/>
+          <p:nvPr/>
+        </p:nvSpPr>
+        <p:spPr>
+          <a:xfrm>
+            <a:off x="8110728" y="2404872"/>
+            <a:ext cx="3529584" cy="274320"/>
           </a:xfrm>
           <a:prstGeom prst="rect">
             <a:avLst/>
@@ -7261,7 +8041,7 @@
               <a:buNone/>
             </a:pPr>
             <a:r>
-              <a:rPr lang="en-US" sz="1300" b="1" dirty="0">
+              <a:rPr lang="en-US" sz="1250" b="1" dirty="0">
                 <a:solidFill>
                   <a:srgbClr val="093B5F"/>
                 </a:solidFill>
@@ -7271,20 +8051,20 @@
               </a:rPr>
               <a:t>Azure — West Europe</a:t>
             </a:r>
-            <a:endParaRPr lang="en-US" sz="1300" dirty="0"/>
-          </a:p>
-        </p:txBody>
-      </p:sp>
-      <p:sp>
-        <p:nvSpPr>
-          <p:cNvPr id="18" name="Text 16"/>
-          <p:cNvSpPr txBox="1"/>
-          <p:nvPr/>
-        </p:nvSpPr>
-        <p:spPr>
-          <a:xfrm>
-            <a:off x="8641080" y="3538728"/>
-            <a:ext cx="2788920" cy="329184"/>
+            <a:endParaRPr lang="en-US" sz="1250" dirty="0"/>
+          </a:p>
+        </p:txBody>
+      </p:sp>
+      <p:sp>
+        <p:nvSpPr>
+          <p:cNvPr id="46" name="Text 43"/>
+          <p:cNvSpPr txBox="1"/>
+          <p:nvPr/>
+        </p:nvSpPr>
+        <p:spPr>
+          <a:xfrm>
+            <a:off x="8110728" y="2697480"/>
+            <a:ext cx="3529584" cy="310896"/>
           </a:xfrm>
           <a:prstGeom prst="rect">
             <a:avLst/>
@@ -7297,13 +8077,10 @@
           <a:lstStyle/>
           <a:p>
             <a:pPr algn="ctr" indent="0" marL="0">
-              <a:lnSpc>
-                <a:spcPct val="105000"/>
-              </a:lnSpc>
-              <a:buNone/>
-            </a:pPr>
-            <a:r>
-              <a:rPr lang="en-US" sz="950" dirty="0">
+              <a:buNone/>
+            </a:pPr>
+            <a:r>
+              <a:rPr lang="en-US" sz="900" dirty="0">
                 <a:solidFill>
                   <a:srgbClr val="3A3A3A"/>
                 </a:solidFill>
@@ -7311,46 +8088,65 @@
                 <a:ea typeface="Calibri" pitchFamily="34" charset="-122"/>
                 <a:cs typeface="Calibri" pitchFamily="34" charset="-120"/>
               </a:rPr>
-              <a:t>enewable/eu/ops/&gt;</a:t>
-            </a:r>
-            <a:endParaRPr lang="en-US" sz="950" dirty="0"/>
-          </a:p>
+              <a:t>NL op Amerikaanse hyperscaler</a:t>
+            </a:r>
+            <a:endParaRPr lang="en-US" sz="900" dirty="0"/>
+          </a:p>
+        </p:txBody>
+      </p:sp>
+      <p:sp>
+        <p:nvSpPr>
+          <p:cNvPr id="47" name="Text 44"/>
+          <p:cNvSpPr txBox="1"/>
+          <p:nvPr/>
+        </p:nvSpPr>
+        <p:spPr>
+          <a:xfrm>
+            <a:off x="8001000" y="3090672"/>
+            <a:ext cx="3749040" cy="201168"/>
+          </a:xfrm>
+          <a:prstGeom prst="rect">
+            <a:avLst/>
+          </a:prstGeom>
+          <a:noFill/>
+          <a:ln/>
+        </p:spPr>
+        <p:txBody>
+          <a:bodyPr wrap="square" lIns="0" tIns="0" rIns="0" bIns="0" rtlCol="0" anchor="ctr"/>
+          <a:lstStyle/>
           <a:p>
             <a:pPr algn="ctr" indent="0" marL="0">
-              <a:lnSpc>
-                <a:spcPct val="105000"/>
-              </a:lnSpc>
-              <a:buNone/>
-            </a:pPr>
-            <a:r>
-              <a:rPr lang="en-US" sz="950" dirty="0">
-                <a:solidFill>
-                  <a:srgbClr val="3A3A3A"/>
-                </a:solidFill>
-                <a:latin typeface="Calibri" pitchFamily="34" charset="0"/>
-                <a:ea typeface="Calibri" pitchFamily="34" charset="-122"/>
-                <a:cs typeface="Calibri" pitchFamily="34" charset="-120"/>
-              </a:rPr>
-              <a:t>NL, maar Amerikaanse hyperscaler</a:t>
-            </a:r>
-            <a:endParaRPr lang="en-US" sz="950" dirty="0"/>
-          </a:p>
-        </p:txBody>
-      </p:sp>
-      <p:sp>
-        <p:nvSpPr>
-          <p:cNvPr id="19" name="Shape 17"/>
+              <a:buNone/>
+            </a:pPr>
+            <a:r>
+              <a:rPr lang="en-US" sz="900" b="1" dirty="0">
+                <a:solidFill>
+                  <a:srgbClr val="093B5F"/>
+                </a:solidFill>
+                <a:latin typeface="Calibri" pitchFamily="34" charset="0"/>
+                <a:ea typeface="Calibri" pitchFamily="34" charset="-122"/>
+                <a:cs typeface="Calibri" pitchFamily="34" charset="-120"/>
+              </a:rPr>
+              <a:t>RDP: enewable/eu/ops/&gt;</a:t>
+            </a:r>
+            <a:endParaRPr lang="en-US" sz="900" dirty="0"/>
+          </a:p>
+        </p:txBody>
+      </p:sp>
+      <p:sp>
+        <p:nvSpPr>
+          <p:cNvPr id="48" name="Shape 45"/>
           <p:cNvSpPr/>
           <p:nvPr/>
         </p:nvSpPr>
         <p:spPr>
           <a:xfrm>
-            <a:off x="8503920" y="4206240"/>
-            <a:ext cx="3063240" cy="914400"/>
+            <a:off x="8001000" y="3364992"/>
+            <a:ext cx="3749040" cy="731520"/>
           </a:xfrm>
           <a:prstGeom prst="roundRect">
             <a:avLst>
-              <a:gd name="adj" fmla="val 10000"/>
+              <a:gd name="adj" fmla="val 12500"/>
             </a:avLst>
           </a:prstGeom>
           <a:solidFill>
@@ -7366,14 +8162,14 @@
       </p:sp>
       <p:sp>
         <p:nvSpPr>
-          <p:cNvPr id="20" name="Text 18"/>
-          <p:cNvSpPr txBox="1"/>
-          <p:nvPr/>
-        </p:nvSpPr>
-        <p:spPr>
-          <a:xfrm>
-            <a:off x="8641080" y="4315968"/>
-            <a:ext cx="2788920" cy="365760"/>
+          <p:cNvPr id="49" name="Text 46"/>
+          <p:cNvSpPr txBox="1"/>
+          <p:nvPr/>
+        </p:nvSpPr>
+        <p:spPr>
+          <a:xfrm>
+            <a:off x="8110728" y="3438144"/>
+            <a:ext cx="3529584" cy="274320"/>
           </a:xfrm>
           <a:prstGeom prst="rect">
             <a:avLst/>
@@ -7389,7 +8185,7 @@
               <a:buNone/>
             </a:pPr>
             <a:r>
-              <a:rPr lang="en-US" sz="1300" b="1" dirty="0">
+              <a:rPr lang="en-US" sz="1250" b="1" dirty="0">
                 <a:solidFill>
                   <a:srgbClr val="093B5F"/>
                 </a:solidFill>
@@ -7399,20 +8195,20 @@
               </a:rPr>
               <a:t>STACKIT — eu01</a:t>
             </a:r>
-            <a:endParaRPr lang="en-US" sz="1300" dirty="0"/>
-          </a:p>
-        </p:txBody>
-      </p:sp>
-      <p:sp>
-        <p:nvSpPr>
-          <p:cNvPr id="21" name="Text 19"/>
-          <p:cNvSpPr txBox="1"/>
-          <p:nvPr/>
-        </p:nvSpPr>
-        <p:spPr>
-          <a:xfrm>
-            <a:off x="8641080" y="4681728"/>
-            <a:ext cx="2788920" cy="329184"/>
+            <a:endParaRPr lang="en-US" sz="1250" dirty="0"/>
+          </a:p>
+        </p:txBody>
+      </p:sp>
+      <p:sp>
+        <p:nvSpPr>
+          <p:cNvPr id="50" name="Text 47"/>
+          <p:cNvSpPr txBox="1"/>
+          <p:nvPr/>
+        </p:nvSpPr>
+        <p:spPr>
+          <a:xfrm>
+            <a:off x="8110728" y="3730752"/>
+            <a:ext cx="3529584" cy="310896"/>
           </a:xfrm>
           <a:prstGeom prst="rect">
             <a:avLst/>
@@ -7425,13 +8221,10 @@
           <a:lstStyle/>
           <a:p>
             <a:pPr algn="ctr" indent="0" marL="0">
-              <a:lnSpc>
-                <a:spcPct val="105000"/>
-              </a:lnSpc>
-              <a:buNone/>
-            </a:pPr>
-            <a:r>
-              <a:rPr lang="en-US" sz="950" dirty="0">
+              <a:buNone/>
+            </a:pPr>
+            <a:r>
+              <a:rPr lang="en-US" sz="900" dirty="0">
                 <a:solidFill>
                   <a:srgbClr val="3A3A3A"/>
                 </a:solidFill>
@@ -7439,42 +8232,85 @@
                 <a:ea typeface="Calibri" pitchFamily="34" charset="-122"/>
                 <a:cs typeface="Calibri" pitchFamily="34" charset="-120"/>
               </a:rPr>
-              <a:t>enewable/eu/pii/&gt;</a:t>
-            </a:r>
-            <a:endParaRPr lang="en-US" sz="950" dirty="0"/>
-          </a:p>
+              <a:t>Duitsland, soeverein, dedicated DC</a:t>
+            </a:r>
+            <a:endParaRPr lang="en-US" sz="900" dirty="0"/>
+          </a:p>
+        </p:txBody>
+      </p:sp>
+      <p:sp>
+        <p:nvSpPr>
+          <p:cNvPr id="51" name="Text 48"/>
+          <p:cNvSpPr txBox="1"/>
+          <p:nvPr/>
+        </p:nvSpPr>
+        <p:spPr>
+          <a:xfrm>
+            <a:off x="8001000" y="4123944"/>
+            <a:ext cx="3749040" cy="201168"/>
+          </a:xfrm>
+          <a:prstGeom prst="rect">
+            <a:avLst/>
+          </a:prstGeom>
+          <a:noFill/>
+          <a:ln/>
+        </p:spPr>
+        <p:txBody>
+          <a:bodyPr wrap="square" lIns="0" tIns="0" rIns="0" bIns="0" rtlCol="0" anchor="ctr"/>
+          <a:lstStyle/>
           <a:p>
             <a:pPr algn="ctr" indent="0" marL="0">
-              <a:lnSpc>
-                <a:spcPct val="105000"/>
-              </a:lnSpc>
-              <a:buNone/>
-            </a:pPr>
-            <a:r>
-              <a:rPr lang="en-US" sz="950" dirty="0">
-                <a:solidFill>
-                  <a:srgbClr val="3A3A3A"/>
-                </a:solidFill>
-                <a:latin typeface="Calibri" pitchFamily="34" charset="0"/>
-                <a:ea typeface="Calibri" pitchFamily="34" charset="-122"/>
-                <a:cs typeface="Calibri" pitchFamily="34" charset="-120"/>
-              </a:rPr>
-              <a:t>Duitsland, soeverein, dedicated DC</a:t>
-            </a:r>
-            <a:endParaRPr lang="en-US" sz="950" dirty="0"/>
-          </a:p>
-        </p:txBody>
-      </p:sp>
-      <p:sp>
-        <p:nvSpPr>
-          <p:cNvPr id="22" name="Shape 20"/>
+              <a:buNone/>
+            </a:pPr>
+            <a:r>
+              <a:rPr lang="en-US" sz="900" b="1" dirty="0">
+                <a:solidFill>
+                  <a:srgbClr val="FCA829"/>
+                </a:solidFill>
+                <a:latin typeface="Calibri" pitchFamily="34" charset="0"/>
+                <a:ea typeface="Calibri" pitchFamily="34" charset="-122"/>
+                <a:cs typeface="Calibri" pitchFamily="34" charset="-120"/>
+              </a:rPr>
+              <a:t>RDP: enewable/eu/pii/&gt;</a:t>
+            </a:r>
+            <a:endParaRPr lang="en-US" sz="900" dirty="0"/>
+          </a:p>
+        </p:txBody>
+      </p:sp>
+      <p:pic>
+        <p:nvPicPr>
+          <p:cNvPr id="52" name="Image 1" descr="/tmp/claude-0/-home-claude/53d1957b-c130-5537-9581-24f9dd54b40e/scratchpad/pptx-build/assets/eu_continent.png">    </p:cNvPr>
+          <p:cNvPicPr>
+            <a:picLocks noChangeAspect="1"/>
+          </p:cNvPicPr>
+          <p:nvPr/>
+        </p:nvPicPr>
+        <p:blipFill>
+          <a:blip r:embed="rId2"/>
+          <a:stretch>
+            <a:fillRect/>
+          </a:stretch>
+        </p:blipFill>
+        <p:spPr>
+          <a:xfrm>
+            <a:off x="9029700" y="4233672"/>
+            <a:ext cx="1691640" cy="1554617"/>
+          </a:xfrm>
+          <a:prstGeom prst="rect">
+            <a:avLst/>
+          </a:prstGeom>
+        </p:spPr>
+      </p:pic>
+      <p:sp>
+        <p:nvSpPr>
+          <p:cNvPr id="53" name="Shape 49"/>
           <p:cNvSpPr/>
           <p:nvPr/>
         </p:nvSpPr>
         <p:spPr>
-          <a:xfrm flipV="1">
-            <a:off x="3794760" y="2377440"/>
-            <a:ext cx="4572000" cy="1325880"/>
+          <a:xfrm>
+            <a:off x="4416552" y="1645920"/>
+            <a:ext cx="219456" cy="91440"/>
           </a:xfrm>
           <a:prstGeom prst="line">
             <a:avLst/>
@@ -7491,14 +8327,14 @@
       </p:sp>
       <p:sp>
         <p:nvSpPr>
-          <p:cNvPr id="23" name="Shape 21"/>
+          <p:cNvPr id="54" name="Shape 50"/>
           <p:cNvSpPr/>
           <p:nvPr/>
         </p:nvSpPr>
         <p:spPr>
-          <a:xfrm flipV="1">
-            <a:off x="3794760" y="3520440"/>
-            <a:ext cx="4572000" cy="182880"/>
+          <a:xfrm>
+            <a:off x="4416552" y="2240280"/>
+            <a:ext cx="3511296" cy="457200"/>
           </a:xfrm>
           <a:prstGeom prst="line">
             <a:avLst/>
@@ -7515,14 +8351,14 @@
       </p:sp>
       <p:sp>
         <p:nvSpPr>
-          <p:cNvPr id="24" name="Shape 22"/>
+          <p:cNvPr id="55" name="Shape 51"/>
           <p:cNvSpPr/>
           <p:nvPr/>
         </p:nvSpPr>
         <p:spPr>
           <a:xfrm>
-            <a:off x="3794760" y="3703320"/>
-            <a:ext cx="4572000" cy="960120"/>
+            <a:off x="4416552" y="3547872"/>
+            <a:ext cx="3511296" cy="182880"/>
           </a:xfrm>
           <a:prstGeom prst="line">
             <a:avLst/>
@@ -7539,14 +8375,14 @@
       </p:sp>
       <p:sp>
         <p:nvSpPr>
-          <p:cNvPr id="25" name="Text 23"/>
-          <p:cNvSpPr txBox="1"/>
-          <p:nvPr/>
-        </p:nvSpPr>
-        <p:spPr>
-          <a:xfrm>
-            <a:off x="3931920" y="2331720"/>
-            <a:ext cx="4297680" cy="320040"/>
+          <p:cNvPr id="56" name="Text 52"/>
+          <p:cNvSpPr txBox="1"/>
+          <p:nvPr/>
+        </p:nvSpPr>
+        <p:spPr>
+          <a:xfrm>
+            <a:off x="457200" y="5870448"/>
+            <a:ext cx="11247120" cy="292608"/>
           </a:xfrm>
           <a:prstGeom prst="rect">
             <a:avLst/>
@@ -7558,11 +8394,11 @@
           <a:bodyPr wrap="square" lIns="0" tIns="0" rIns="0" bIns="0" rtlCol="0" anchor="ctr"/>
           <a:lstStyle/>
           <a:p>
-            <a:pPr algn="ctr" indent="0" marL="0">
-              <a:buNone/>
-            </a:pPr>
-            <a:r>
-              <a:rPr lang="en-US" sz="1150" b="1" dirty="0">
+            <a:pPr indent="0" marL="0">
+              <a:buNone/>
+            </a:pPr>
+            <a:r>
+              <a:rPr lang="en-US" sz="1250" b="1" i="1" dirty="0">
                 <a:solidFill>
                   <a:srgbClr val="093B5F"/>
                 </a:solidFill>
@@ -7570,22 +8406,22 @@
                 <a:ea typeface="Calibri" pitchFamily="34" charset="-122"/>
                 <a:cs typeface="Calibri" pitchFamily="34" charset="-120"/>
               </a:rPr>
-              <a:t>3 × queue + REST Delivery Point</a:t>
-            </a:r>
-            <a:endParaRPr lang="en-US" sz="1150" dirty="0"/>
-          </a:p>
-        </p:txBody>
-      </p:sp>
-      <p:sp>
-        <p:nvSpPr>
-          <p:cNvPr id="26" name="Text 24"/>
-          <p:cNvSpPr txBox="1"/>
-          <p:nvPr/>
-        </p:nvSpPr>
-        <p:spPr>
-          <a:xfrm>
-            <a:off x="640080" y="5715000"/>
-            <a:ext cx="10972800" cy="365760"/>
+              <a:t>Eén topic bepaalt de bestemming — niet de tool, niet de discipline van de ontwikkelaar.</a:t>
+            </a:r>
+            <a:endParaRPr lang="en-US" sz="1250" dirty="0"/>
+          </a:p>
+        </p:txBody>
+      </p:sp>
+      <p:sp>
+        <p:nvSpPr>
+          <p:cNvPr id="57" name="Text 53"/>
+          <p:cNvSpPr txBox="1"/>
+          <p:nvPr/>
+        </p:nvSpPr>
+        <p:spPr>
+          <a:xfrm>
+            <a:off x="457200" y="6163056"/>
+            <a:ext cx="11247120" cy="274320"/>
           </a:xfrm>
           <a:prstGeom prst="rect">
             <a:avLst/>
@@ -7601,46 +8437,7 @@
               <a:buNone/>
             </a:pPr>
             <a:r>
-              <a:rPr lang="en-US" sz="1300" b="1" i="1" dirty="0">
-                <a:solidFill>
-                  <a:srgbClr val="093B5F"/>
-                </a:solidFill>
-                <a:latin typeface="Calibri" pitchFamily="34" charset="0"/>
-                <a:ea typeface="Calibri" pitchFamily="34" charset="-122"/>
-                <a:cs typeface="Calibri" pitchFamily="34" charset="-120"/>
-              </a:rPr>
-              <a:t>Eén topic bepaalt de bestemming — niet de tool, niet de discipline van de ontwikkelaar.</a:t>
-            </a:r>
-            <a:endParaRPr lang="en-US" sz="1300" dirty="0"/>
-          </a:p>
-        </p:txBody>
-      </p:sp>
-      <p:sp>
-        <p:nvSpPr>
-          <p:cNvPr id="27" name="Text 25"/>
-          <p:cNvSpPr txBox="1"/>
-          <p:nvPr/>
-        </p:nvSpPr>
-        <p:spPr>
-          <a:xfrm>
-            <a:off x="640080" y="6053328"/>
-            <a:ext cx="10972800" cy="320040"/>
-          </a:xfrm>
-          <a:prstGeom prst="rect">
-            <a:avLst/>
-          </a:prstGeom>
-          <a:noFill/>
-          <a:ln/>
-        </p:spPr>
-        <p:txBody>
-          <a:bodyPr wrap="square" lIns="0" tIns="0" rIns="0" bIns="0" rtlCol="0" anchor="ctr"/>
-          <a:lstStyle/>
-          <a:p>
-            <a:pPr indent="0" marL="0">
-              <a:buNone/>
-            </a:pPr>
-            <a:r>
-              <a:rPr lang="en-US" sz="1050" dirty="0">
+              <a:rPr lang="en-US" sz="1000" dirty="0">
                 <a:solidFill>
                   <a:srgbClr val="6A6A6A"/>
                 </a:solidFill>
@@ -7648,15 +8445,15 @@
                 <a:ea typeface="Calibri" pitchFamily="34" charset="-122"/>
                 <a:cs typeface="Calibri" pitchFamily="34" charset="-120"/>
               </a:rPr>
-              <a:t>Elke pijl = één queue + REST Delivery Point, die exact één topic-subtree 1-op-1 doorstuurt naar de bijbehorende cloud-broker.</a:t>
-            </a:r>
-            <a:endParaRPr lang="en-US" sz="1050" dirty="0"/>
-          </a:p>
-        </p:txBody>
-      </p:sp>
-      <p:sp>
-        <p:nvSpPr>
-          <p:cNvPr id="28" name="Text 26"/>
+              <a:t>Elke pijl = één queue + REST Delivery Point; het label toont de exacte topic-subscriptie waarmee die RDP exporteert.</a:t>
+            </a:r>
+            <a:endParaRPr lang="en-US" sz="1000" dirty="0"/>
+          </a:p>
+        </p:txBody>
+      </p:sp>
+      <p:sp>
+        <p:nvSpPr>
+          <p:cNvPr id="58" name="Text 54"/>
           <p:cNvSpPr txBox="1"/>
           <p:nvPr/>
         </p:nvSpPr>
@@ -7695,7 +8492,7 @@
       </p:sp>
       <p:sp>
         <p:nvSpPr>
-          <p:cNvPr id="29" name="Text 27"/>
+          <p:cNvPr id="59" name="Text 55"/>
           <p:cNvSpPr txBox="1"/>
           <p:nvPr/>
         </p:nvSpPr>
@@ -7734,7 +8531,7 @@
       </p:sp>
       <p:sp>
         <p:nvSpPr>
-          <p:cNvPr id="30" name="Text 0"/>
+          <p:cNvPr id="60" name="Text 0"/>
           <p:cNvSpPr/>
           <p:nvPr>
             <p:ph idx="101" type="body" hasCustomPrompt="1"/>
